--- a/cursos/recursos/el-mapa-de-los-finales/15-alfiles-de-distinto-color-i.pptx
+++ b/cursos/recursos/el-mapa-de-los-finales/15-alfiles-de-distinto-color-i.pptx
@@ -6391,7 +6391,7 @@
                 </a:solidFill>
                 <a:latin typeface="Calibri"/>
               </a:rPr>
-              <a:t>•  Recorré cada línea principal hasta entender el porqué de cada jugada.</a:t>
+              <a:t>•  Recorre cada línea principal hasta entender el porqué de cada jugada.</a:t>
             </a:r>
           </a:p>
           <a:p>
@@ -6407,7 +6407,7 @@
                 </a:solidFill>
                 <a:latin typeface="Calibri"/>
               </a:rPr>
-              <a:t>•  Practicá primero las posiciones clave, después las demás.</a:t>
+              <a:t>•  Practica primero las posiciones clave, después las demás.</a:t>
             </a:r>
           </a:p>
           <a:p>
@@ -6423,7 +6423,7 @@
                 </a:solidFill>
                 <a:latin typeface="Calibri"/>
               </a:rPr>
-              <a:t>•  Anotá las reglas de cada final con tus palabras.</a:t>
+              <a:t>•  Anota las reglas de cada final con tus palabras.</a:t>
             </a:r>
           </a:p>
         </p:txBody>
